--- a/STP/presentations/training options.pptx
+++ b/STP/presentations/training options.pptx
@@ -668,7 +668,7 @@
           <a:p>
             <a:fld id="{779B1DDD-8229-2C4E-8910-A0E8F8BF9E17}" type="datetimeFigureOut">
               <a:rPr lang="en-IT" smtClean="0"/>
-              <a:t>27/11/25</a:t>
+              <a:t>28/11/25</a:t>
             </a:fld>
             <a:endParaRPr lang="en-IT"/>
           </a:p>
@@ -1085,7 +1085,7 @@
           <a:p>
             <a:fld id="{F8A8B291-23C9-4CE5-96D0-E0118EB6230C}" type="datetimeFigureOut">
               <a:rPr lang="en-GB" smtClean="0"/>
-              <a:t>27/11/2025</a:t>
+              <a:t>28/11/2025</a:t>
             </a:fld>
             <a:endParaRPr lang="en-GB"/>
           </a:p>
@@ -1285,7 +1285,7 @@
           <a:p>
             <a:fld id="{F8A8B291-23C9-4CE5-96D0-E0118EB6230C}" type="datetimeFigureOut">
               <a:rPr lang="en-GB" smtClean="0"/>
-              <a:t>27/11/2025</a:t>
+              <a:t>28/11/2025</a:t>
             </a:fld>
             <a:endParaRPr lang="en-GB"/>
           </a:p>
@@ -1495,7 +1495,7 @@
           <a:p>
             <a:fld id="{F8A8B291-23C9-4CE5-96D0-E0118EB6230C}" type="datetimeFigureOut">
               <a:rPr lang="en-GB" smtClean="0"/>
-              <a:t>27/11/2025</a:t>
+              <a:t>28/11/2025</a:t>
             </a:fld>
             <a:endParaRPr lang="en-GB"/>
           </a:p>
@@ -1695,7 +1695,7 @@
           <a:p>
             <a:fld id="{F8A8B291-23C9-4CE5-96D0-E0118EB6230C}" type="datetimeFigureOut">
               <a:rPr lang="en-GB" smtClean="0"/>
-              <a:t>27/11/2025</a:t>
+              <a:t>28/11/2025</a:t>
             </a:fld>
             <a:endParaRPr lang="en-GB"/>
           </a:p>
@@ -1971,7 +1971,7 @@
           <a:p>
             <a:fld id="{F8A8B291-23C9-4CE5-96D0-E0118EB6230C}" type="datetimeFigureOut">
               <a:rPr lang="en-GB" smtClean="0"/>
-              <a:t>27/11/2025</a:t>
+              <a:t>28/11/2025</a:t>
             </a:fld>
             <a:endParaRPr lang="en-GB"/>
           </a:p>
@@ -2239,7 +2239,7 @@
           <a:p>
             <a:fld id="{F8A8B291-23C9-4CE5-96D0-E0118EB6230C}" type="datetimeFigureOut">
               <a:rPr lang="en-GB" smtClean="0"/>
-              <a:t>27/11/2025</a:t>
+              <a:t>28/11/2025</a:t>
             </a:fld>
             <a:endParaRPr lang="en-GB"/>
           </a:p>
@@ -2654,7 +2654,7 @@
           <a:p>
             <a:fld id="{F8A8B291-23C9-4CE5-96D0-E0118EB6230C}" type="datetimeFigureOut">
               <a:rPr lang="en-GB" smtClean="0"/>
-              <a:t>27/11/2025</a:t>
+              <a:t>28/11/2025</a:t>
             </a:fld>
             <a:endParaRPr lang="en-GB"/>
           </a:p>
@@ -2796,7 +2796,7 @@
           <a:p>
             <a:fld id="{F8A8B291-23C9-4CE5-96D0-E0118EB6230C}" type="datetimeFigureOut">
               <a:rPr lang="en-GB" smtClean="0"/>
-              <a:t>27/11/2025</a:t>
+              <a:t>28/11/2025</a:t>
             </a:fld>
             <a:endParaRPr lang="en-GB"/>
           </a:p>
@@ -2909,7 +2909,7 @@
           <a:p>
             <a:fld id="{F8A8B291-23C9-4CE5-96D0-E0118EB6230C}" type="datetimeFigureOut">
               <a:rPr lang="en-GB" smtClean="0"/>
-              <a:t>27/11/2025</a:t>
+              <a:t>28/11/2025</a:t>
             </a:fld>
             <a:endParaRPr lang="en-GB"/>
           </a:p>
@@ -3222,7 +3222,7 @@
           <a:p>
             <a:fld id="{F8A8B291-23C9-4CE5-96D0-E0118EB6230C}" type="datetimeFigureOut">
               <a:rPr lang="en-GB" smtClean="0"/>
-              <a:t>27/11/2025</a:t>
+              <a:t>28/11/2025</a:t>
             </a:fld>
             <a:endParaRPr lang="en-GB"/>
           </a:p>
@@ -3511,7 +3511,7 @@
           <a:p>
             <a:fld id="{F8A8B291-23C9-4CE5-96D0-E0118EB6230C}" type="datetimeFigureOut">
               <a:rPr lang="en-GB" smtClean="0"/>
-              <a:t>27/11/2025</a:t>
+              <a:t>28/11/2025</a:t>
             </a:fld>
             <a:endParaRPr lang="en-GB"/>
           </a:p>
@@ -3754,7 +3754,7 @@
           <a:p>
             <a:fld id="{F8A8B291-23C9-4CE5-96D0-E0118EB6230C}" type="datetimeFigureOut">
               <a:rPr lang="en-GB" smtClean="0"/>
-              <a:t>27/11/2025</a:t>
+              <a:t>28/11/2025</a:t>
             </a:fld>
             <a:endParaRPr lang="en-GB"/>
           </a:p>
@@ -4751,15 +4751,22 @@
           <a:lstStyle/>
           <a:p>
             <a:r>
-              <a:rPr lang="en-US" sz="3200" b="1" dirty="0">
+              <a:rPr lang="en-US" sz="3200" b="1">
                 <a:solidFill>
                   <a:srgbClr val="0070C0"/>
                 </a:solidFill>
                 <a:latin typeface="Arial" panose="020B0604020202020204" pitchFamily="34" charset="0"/>
                 <a:cs typeface="Arial" panose="020B0604020202020204" pitchFamily="34" charset="0"/>
               </a:rPr>
-              <a:t>Possible training activities</a:t>
-            </a:r>
+              <a:t>Potential trainings</a:t>
+            </a:r>
+            <a:endParaRPr lang="en-US" sz="3200" b="1" dirty="0">
+              <a:solidFill>
+                <a:srgbClr val="0070C0"/>
+              </a:solidFill>
+              <a:latin typeface="Arial" panose="020B0604020202020204" pitchFamily="34" charset="0"/>
+              <a:cs typeface="Arial" panose="020B0604020202020204" pitchFamily="34" charset="0"/>
+            </a:endParaRPr>
           </a:p>
         </p:txBody>
       </p:sp>
@@ -4944,7 +4951,7 @@
           <p:nvPr>
             <p:extLst>
               <p:ext uri="{D42A27DB-BD31-4B8C-83A1-F6EECF244321}">
-                <p14:modId xmlns:p14="http://schemas.microsoft.com/office/powerpoint/2010/main" val="3738870811"/>
+                <p14:modId xmlns:p14="http://schemas.microsoft.com/office/powerpoint/2010/main" val="1493956222"/>
               </p:ext>
             </p:extLst>
           </p:nvPr>
@@ -5000,7 +5007,7 @@
                       </a:pPr>
                       <a:r>
                         <a:rPr lang="en-GB" sz="1400" dirty="0"/>
-                        <a:t>Proposed training title</a:t>
+                        <a:t>Training title</a:t>
                       </a:r>
                     </a:p>
                   </a:txBody>
@@ -5072,10 +5079,10 @@
                       <a:r>
                         <a:rPr lang="en-GB" sz="1400" dirty="0">
                           <a:solidFill>
-                            <a:srgbClr val="FF0000"/>
+                            <a:schemeClr val="tx1"/>
                           </a:solidFill>
                         </a:rPr>
-                        <a:t>Introduction to Climate Risk Assessment Tools for Agriculture and Fisheries</a:t>
+                        <a:t>Climate Science for Climate Action</a:t>
                       </a:r>
                     </a:p>
                   </a:txBody>
@@ -5091,7 +5098,7 @@
                       </a:pPr>
                       <a:r>
                         <a:rPr lang="en-GB" sz="1400" dirty="0"/>
-                        <a:t>Provide an overview of the national climate risk assessment, main findings, and how to navigate and use available tools and datasets.</a:t>
+                        <a:t>Provide an overview of the key information needed to produce climate risk assessments and study the impact of climate change</a:t>
                       </a:r>
                     </a:p>
                   </a:txBody>
@@ -5107,7 +5114,7 @@
                       </a:pPr>
                       <a:r>
                         <a:rPr lang="en-GB" sz="1400" dirty="0"/>
-                        <a:t>key climate and ocean datasets, basic risk assessment concepts</a:t>
+                        <a:t>key climate and ocean datasets, basic risk assessment concepts. Mostly theoretical</a:t>
                       </a:r>
                     </a:p>
                   </a:txBody>
@@ -5145,9 +5152,26 @@
                         <a:buNone/>
                       </a:pPr>
                       <a:r>
-                        <a:rPr lang="en-GB" sz="1400" dirty="0"/>
-                        <a:t>Hands-on Training on CAVA for Climate and Sectoral Risk Analytics</a:t>
+                        <a:rPr lang="en-GB" sz="1400" dirty="0">
+                          <a:solidFill>
+                            <a:srgbClr val="FF0000"/>
+                          </a:solidFill>
+                        </a:rPr>
+                        <a:t>Hands-on Training on tools for Climate and Sectoral </a:t>
                       </a:r>
+                      <a:r>
+                        <a:rPr lang="en-GB" sz="1400">
+                          <a:solidFill>
+                            <a:srgbClr val="FF0000"/>
+                          </a:solidFill>
+                        </a:rPr>
+                        <a:t>Risk Assessments</a:t>
+                      </a:r>
+                      <a:endParaRPr lang="en-GB" sz="1400" dirty="0">
+                        <a:solidFill>
+                          <a:srgbClr val="FF0000"/>
+                        </a:solidFill>
+                      </a:endParaRPr>
                     </a:p>
                   </a:txBody>
                   <a:tcPr anchor="ctr"/>
@@ -5161,8 +5185,8 @@
                         <a:buNone/>
                       </a:pPr>
                       <a:r>
-                        <a:rPr lang="en-GB" sz="1400"/>
-                        <a:t>Build practical skills to run, visualise and interpret climate risk analyses for crops and fisheries using the CAVA platform.</a:t>
+                        <a:rPr lang="en-GB" sz="1400" dirty="0"/>
+                        <a:t>Build practical skills to run, visualise and interpret climate risk analyses for crops and fisheries using a wide set of tools.</a:t>
                       </a:r>
                     </a:p>
                   </a:txBody>
@@ -5178,7 +5202,7 @@
                       </a:pPr>
                       <a:r>
                         <a:rPr lang="en-GB" sz="1400" dirty="0"/>
-                        <a:t>CAVA platform (web/R/Python), mapping, indicators, basic analytics workflow</a:t>
+                        <a:t>CAVA platform (web/R/Python), basic analytics workflow</a:t>
                       </a:r>
                     </a:p>
                   </a:txBody>
@@ -6439,6 +6463,15 @@
 </file>
 
 <file path=customXml/item1.xml><?xml version="1.0" encoding="utf-8"?>
+<?mso-contentType ?>
+<FormTemplates xmlns="http://schemas.microsoft.com/sharepoint/v3/contenttype/forms">
+  <Display>DocumentLibraryForm</Display>
+  <Edit>DocumentLibraryForm</Edit>
+  <New>DocumentLibraryForm</New>
+</FormTemplates>
+</file>
+
+<file path=customXml/item2.xml><?xml version="1.0" encoding="utf-8"?>
 <p:properties xmlns:p="http://schemas.microsoft.com/office/2006/metadata/properties" xmlns:xsi="http://www.w3.org/2001/XMLSchema-instance" xmlns:pc="http://schemas.microsoft.com/office/infopath/2007/PartnerControls">
   <documentManagement>
     <lcf76f155ced4ddcb4097134ff3c332f xmlns="c0caafef-fd22-48d0-85dc-526f5aa604f6">
@@ -6447,15 +6480,6 @@
     <TaxCatchAll xmlns="cc7ce8ca-8f52-44ec-9496-3c41d0f5ad18" xsi:nil="true"/>
   </documentManagement>
 </p:properties>
-</file>
-
-<file path=customXml/item2.xml><?xml version="1.0" encoding="utf-8"?>
-<?mso-contentType ?>
-<FormTemplates xmlns="http://schemas.microsoft.com/sharepoint/v3/contenttype/forms">
-  <Display>DocumentLibraryForm</Display>
-  <Edit>DocumentLibraryForm</Edit>
-  <New>DocumentLibraryForm</New>
-</FormTemplates>
 </file>
 
 <file path=customXml/item3.xml><?xml version="1.0" encoding="utf-8"?>
@@ -6708,20 +6732,20 @@
 </file>
 
 <file path=customXml/itemProps1.xml><?xml version="1.0" encoding="utf-8"?>
+<ds:datastoreItem xmlns:ds="http://schemas.openxmlformats.org/officeDocument/2006/customXml" ds:itemID="{3A3DF9AB-00FC-46DB-A5D6-293E8DE99346}">
+  <ds:schemaRefs>
+    <ds:schemaRef ds:uri="http://schemas.microsoft.com/sharepoint/v3/contenttype/forms"/>
+  </ds:schemaRefs>
+</ds:datastoreItem>
+</file>
+
+<file path=customXml/itemProps2.xml><?xml version="1.0" encoding="utf-8"?>
 <ds:datastoreItem xmlns:ds="http://schemas.openxmlformats.org/officeDocument/2006/customXml" ds:itemID="{E17CF73B-06D3-4F9B-955D-0740B08863BD}">
   <ds:schemaRefs>
     <ds:schemaRef ds:uri="http://schemas.microsoft.com/office/2006/metadata/properties"/>
     <ds:schemaRef ds:uri="http://schemas.microsoft.com/office/infopath/2007/PartnerControls"/>
     <ds:schemaRef ds:uri="c0caafef-fd22-48d0-85dc-526f5aa604f6"/>
     <ds:schemaRef ds:uri="cc7ce8ca-8f52-44ec-9496-3c41d0f5ad18"/>
-  </ds:schemaRefs>
-</ds:datastoreItem>
-</file>
-
-<file path=customXml/itemProps2.xml><?xml version="1.0" encoding="utf-8"?>
-<ds:datastoreItem xmlns:ds="http://schemas.openxmlformats.org/officeDocument/2006/customXml" ds:itemID="{3A3DF9AB-00FC-46DB-A5D6-293E8DE99346}">
-  <ds:schemaRefs>
-    <ds:schemaRef ds:uri="http://schemas.microsoft.com/sharepoint/v3/contenttype/forms"/>
   </ds:schemaRefs>
 </ds:datastoreItem>
 </file>
